--- a/slides/ws1-blog1-new-executive-design.pptx
+++ b/slides/ws1-blog1-new-executive-design.pptx
@@ -4555,7 +4555,7 @@
               <a:srgbClr val="1A73E8"/>
             </a:solidFill>
             <a:prstDash val="solid"/>
-            <a:tailEnd type="arrow"/>
+            <a:tailEnd type="arrow" w="sm" len="sm"/>
           </a:ln>
         </p:spPr>
       </p:sp>
@@ -13197,7 +13197,7 @@
               <a:srgbClr val="1A73E8"/>
             </a:solidFill>
             <a:prstDash val="solid"/>
-            <a:tailEnd type="arrow"/>
+            <a:tailEnd type="arrow" w="sm" len="sm"/>
           </a:ln>
         </p:spPr>
       </p:sp>
@@ -13221,7 +13221,7 @@
               <a:srgbClr val="1A73E8"/>
             </a:solidFill>
             <a:prstDash val="solid"/>
-            <a:tailEnd type="arrow"/>
+            <a:tailEnd type="arrow" w="sm" len="sm"/>
           </a:ln>
         </p:spPr>
       </p:sp>
@@ -13433,7 +13433,7 @@
               <a:srgbClr val="1A73E8"/>
             </a:solidFill>
             <a:prstDash val="solid"/>
-            <a:tailEnd type="arrow"/>
+            <a:tailEnd type="arrow" w="sm" len="sm"/>
           </a:ln>
         </p:spPr>
       </p:sp>
@@ -13579,7 +13579,7 @@
               <a:srgbClr val="1A73E8"/>
             </a:solidFill>
             <a:prstDash val="solid"/>
-            <a:tailEnd type="arrow"/>
+            <a:tailEnd type="arrow" w="sm" len="sm"/>
           </a:ln>
         </p:spPr>
       </p:sp>
@@ -13725,7 +13725,7 @@
               <a:srgbClr val="1A73E8"/>
             </a:solidFill>
             <a:prstDash val="solid"/>
-            <a:tailEnd type="arrow"/>
+            <a:tailEnd type="arrow" w="sm" len="sm"/>
           </a:ln>
         </p:spPr>
       </p:sp>
@@ -13871,7 +13871,7 @@
               <a:srgbClr val="1A73E8"/>
             </a:solidFill>
             <a:prstDash val="solid"/>
-            <a:tailEnd type="arrow"/>
+            <a:tailEnd type="arrow" w="sm" len="sm"/>
           </a:ln>
         </p:spPr>
       </p:sp>
@@ -14083,7 +14083,7 @@
               <a:srgbClr val="1E8E3E"/>
             </a:solidFill>
             <a:prstDash val="solid"/>
-            <a:tailEnd type="arrow"/>
+            <a:tailEnd type="arrow" w="sm" len="sm"/>
           </a:ln>
         </p:spPr>
       </p:sp>
@@ -14107,7 +14107,7 @@
               <a:srgbClr val="1E8E3E"/>
             </a:solidFill>
             <a:prstDash val="solid"/>
-            <a:tailEnd type="arrow"/>
+            <a:tailEnd type="arrow" w="sm" len="sm"/>
           </a:ln>
         </p:spPr>
       </p:sp>
@@ -14131,7 +14131,7 @@
               <a:srgbClr val="1E8E3E"/>
             </a:solidFill>
             <a:prstDash val="solid"/>
-            <a:tailEnd type="arrow"/>
+            <a:tailEnd type="arrow" w="sm" len="sm"/>
           </a:ln>
         </p:spPr>
       </p:sp>
@@ -15439,7 +15439,7 @@
               <a:srgbClr val="1A73E8"/>
             </a:solidFill>
             <a:prstDash val="solid"/>
-            <a:tailEnd type="arrow"/>
+            <a:tailEnd type="arrow" w="sm" len="sm"/>
           </a:ln>
         </p:spPr>
       </p:sp>
@@ -15668,7 +15668,7 @@
               <a:srgbClr val="1A73E8"/>
             </a:solidFill>
             <a:prstDash val="solid"/>
-            <a:tailEnd type="arrow"/>
+            <a:tailEnd type="arrow" w="sm" len="sm"/>
           </a:ln>
         </p:spPr>
       </p:sp>
@@ -16102,7 +16102,7 @@
               <a:srgbClr val="1A73E8"/>
             </a:solidFill>
             <a:prstDash val="solid"/>
-            <a:tailEnd type="arrow"/>
+            <a:tailEnd type="arrow" w="sm" len="sm"/>
           </a:ln>
         </p:spPr>
       </p:sp>
@@ -16331,7 +16331,7 @@
               <a:srgbClr val="1A73E8"/>
             </a:solidFill>
             <a:prstDash val="solid"/>
-            <a:tailEnd type="arrow"/>
+            <a:tailEnd type="arrow" w="sm" len="sm"/>
           </a:ln>
         </p:spPr>
       </p:sp>
@@ -17999,7 +17999,7 @@
               <a:srgbClr val="1A73E8"/>
             </a:solidFill>
             <a:prstDash val="solid"/>
-            <a:tailEnd type="arrow"/>
+            <a:tailEnd type="arrow" w="sm" len="sm"/>
           </a:ln>
         </p:spPr>
       </p:sp>
@@ -18412,7 +18412,7 @@
               <a:srgbClr val="1A73E8"/>
             </a:solidFill>
             <a:prstDash val="solid"/>
-            <a:tailEnd type="arrow"/>
+            <a:tailEnd type="arrow" w="sm" len="sm"/>
           </a:ln>
         </p:spPr>
       </p:sp>
@@ -23887,7 +23887,7 @@
               <a:srgbClr val="1A73E8"/>
             </a:solidFill>
             <a:prstDash val="solid"/>
-            <a:tailEnd type="arrow"/>
+            <a:tailEnd type="arrow" w="sm" len="sm"/>
           </a:ln>
         </p:spPr>
       </p:sp>
@@ -23977,7 +23977,7 @@
               <a:srgbClr val="1A73E8"/>
             </a:solidFill>
             <a:prstDash val="solid"/>
-            <a:tailEnd type="arrow"/>
+            <a:tailEnd type="arrow" w="sm" len="sm"/>
           </a:ln>
         </p:spPr>
       </p:sp>
@@ -24067,7 +24067,7 @@
               <a:srgbClr val="1E8E3E"/>
             </a:solidFill>
             <a:prstDash val="solid"/>
-            <a:tailEnd type="arrow"/>
+            <a:tailEnd type="arrow" w="sm" len="sm"/>
           </a:ln>
         </p:spPr>
       </p:sp>
@@ -24157,7 +24157,7 @@
               <a:srgbClr val="B06000"/>
             </a:solidFill>
             <a:prstDash val="solid"/>
-            <a:tailEnd type="arrow"/>
+            <a:tailEnd type="arrow" w="sm" len="sm"/>
           </a:ln>
         </p:spPr>
       </p:sp>
@@ -24247,7 +24247,7 @@
               <a:srgbClr val="1E8E3E"/>
             </a:solidFill>
             <a:prstDash val="solid"/>
-            <a:headEnd type="arrow"/>
+            <a:headEnd type="arrow" w="sm" len="sm"/>
           </a:ln>
         </p:spPr>
       </p:sp>
